--- a/docs/sales/service-proposal.pptx
+++ b/docs/sales/service-proposal.pptx
@@ -36440,7 +36440,7 @@
         <p:spPr>
           <a:xfrm>
             <a:off x="877824" y="2011680"/>
-            <a:ext cx="15240" cy="365760"/>
+            <a:ext cx="15240" cy="292608"/>
           </a:xfrm>
           <a:prstGeom prst="rect">
             <a:avLst/>
@@ -36639,7 +36639,7 @@
                 <a:latin typeface="游ゴシック"/>
                 <a:ea typeface="游ゴシック"/>
               </a:rPr>
-              <a:t>御社の強み、狙いたい層、競合状況を伺います。この段階で、どのキーワードが狙えそうかの見立てをお出しします</a:t>
+              <a:t>御社の強み、狙いたい層、競合状況を伺います。この場で、どのキーワードが狙えそうかの見立てをお出しします</a:t>
             </a:r>
           </a:p>
         </p:txBody>
@@ -36652,7 +36652,7 @@
         </p:nvSpPr>
         <p:spPr>
           <a:xfrm>
-            <a:off x="658368" y="2386584"/>
+            <a:off x="658368" y="2304288"/>
             <a:ext cx="457200" cy="457200"/>
           </a:xfrm>
           <a:prstGeom prst="rect">
@@ -36696,7 +36696,7 @@
         </p:nvSpPr>
         <p:spPr>
           <a:xfrm>
-            <a:off x="658368" y="2505456"/>
+            <a:off x="658368" y="2423160"/>
             <a:ext cx="457200" cy="274320"/>
           </a:xfrm>
           <a:prstGeom prst="rect">
@@ -36736,8 +36736,8 @@
         </p:nvSpPr>
         <p:spPr>
           <a:xfrm>
-            <a:off x="877824" y="2880360"/>
-            <a:ext cx="15240" cy="365760"/>
+            <a:off x="877824" y="2798064"/>
+            <a:ext cx="15240" cy="292608"/>
           </a:xfrm>
           <a:prstGeom prst="rect">
             <a:avLst/>
@@ -36780,7 +36780,7 @@
         </p:nvSpPr>
         <p:spPr>
           <a:xfrm>
-            <a:off x="1316736" y="2368296"/>
+            <a:off x="1316736" y="2286000"/>
             <a:ext cx="2743200" cy="274320"/>
           </a:xfrm>
           <a:prstGeom prst="rect">
@@ -36807,7 +36807,7 @@
                 <a:latin typeface="游ゴシック"/>
                 <a:ea typeface="游ゴシック"/>
               </a:rPr>
-              <a:t>ご提案・お見積り</a:t>
+              <a:t>ヒアリングシートのご記入</a:t>
             </a:r>
           </a:p>
         </p:txBody>
@@ -36820,7 +36820,7 @@
         </p:nvSpPr>
         <p:spPr>
           <a:xfrm>
-            <a:off x="4133088" y="2404872"/>
+            <a:off x="4133088" y="2322576"/>
             <a:ext cx="868680" cy="256032"/>
           </a:xfrm>
           <a:prstGeom prst="rect">
@@ -36866,7 +36866,7 @@
         </p:nvSpPr>
         <p:spPr>
           <a:xfrm>
-            <a:off x="4133088" y="2441448"/>
+            <a:off x="4133088" y="2359152"/>
             <a:ext cx="868680" cy="219456"/>
           </a:xfrm>
           <a:prstGeom prst="rect">
@@ -36893,7 +36893,7 @@
                 <a:latin typeface="游ゴシック"/>
                 <a:ea typeface="游ゴシック"/>
               </a:rPr>
-              <a:t>1週間</a:t>
+              <a:t>30分程度</a:t>
             </a:r>
           </a:p>
         </p:txBody>
@@ -36906,7 +36906,7 @@
         </p:nvSpPr>
         <p:spPr>
           <a:xfrm>
-            <a:off x="1316736" y="2697480"/>
+            <a:off x="1316736" y="2615184"/>
             <a:ext cx="8534095" cy="457200"/>
           </a:xfrm>
           <a:prstGeom prst="rect">
@@ -36936,7 +36936,7 @@
                 <a:latin typeface="游ゴシック"/>
                 <a:ea typeface="游ゴシック"/>
               </a:rPr>
-              <a:t>サイト構成とキーワードの一覧をご提案します。ご要望を反映してから着手します</a:t>
+              <a:t>1枚のシートをお渡しします。ご記入いただくのはこの1回だけで、主力商材・守備範囲・実績の数値・問い合わせ導線が決まります</a:t>
             </a:r>
           </a:p>
         </p:txBody>
@@ -36949,7 +36949,7 @@
         </p:nvSpPr>
         <p:spPr>
           <a:xfrm>
-            <a:off x="658368" y="3255264"/>
+            <a:off x="658368" y="3090672"/>
             <a:ext cx="457200" cy="457200"/>
           </a:xfrm>
           <a:prstGeom prst="rect">
@@ -36993,7 +36993,7 @@
         </p:nvSpPr>
         <p:spPr>
           <a:xfrm>
-            <a:off x="658368" y="3374136"/>
+            <a:off x="658368" y="3209544"/>
             <a:ext cx="457200" cy="274320"/>
           </a:xfrm>
           <a:prstGeom prst="rect">
@@ -37033,8 +37033,8 @@
         </p:nvSpPr>
         <p:spPr>
           <a:xfrm>
-            <a:off x="877824" y="3749040"/>
-            <a:ext cx="15240" cy="365760"/>
+            <a:off x="877824" y="3584448"/>
+            <a:ext cx="15240" cy="292608"/>
           </a:xfrm>
           <a:prstGeom prst="rect">
             <a:avLst/>
@@ -37077,7 +37077,7 @@
         </p:nvSpPr>
         <p:spPr>
           <a:xfrm>
-            <a:off x="1316736" y="3236976"/>
+            <a:off x="1316736" y="3072384"/>
             <a:ext cx="2743200" cy="274320"/>
           </a:xfrm>
           <a:prstGeom prst="rect">
@@ -37104,7 +37104,7 @@
                 <a:latin typeface="游ゴシック"/>
                 <a:ea typeface="游ゴシック"/>
               </a:rPr>
-              <a:t>サイト構築</a:t>
+              <a:t>ご提案・お見積り</a:t>
             </a:r>
           </a:p>
         </p:txBody>
@@ -37117,7 +37117,7 @@
         </p:nvSpPr>
         <p:spPr>
           <a:xfrm>
-            <a:off x="4133088" y="3273552"/>
+            <a:off x="4133088" y="3108960"/>
             <a:ext cx="868680" cy="256032"/>
           </a:xfrm>
           <a:prstGeom prst="rect">
@@ -37163,7 +37163,7 @@
         </p:nvSpPr>
         <p:spPr>
           <a:xfrm>
-            <a:off x="4133088" y="3310128"/>
+            <a:off x="4133088" y="3145536"/>
             <a:ext cx="868680" cy="219456"/>
           </a:xfrm>
           <a:prstGeom prst="rect">
@@ -37190,7 +37190,7 @@
                 <a:latin typeface="游ゴシック"/>
                 <a:ea typeface="游ゴシック"/>
               </a:rPr>
-              <a:t>2〜3週間</a:t>
+              <a:t>1週間</a:t>
             </a:r>
           </a:p>
         </p:txBody>
@@ -37203,7 +37203,7 @@
         </p:nvSpPr>
         <p:spPr>
           <a:xfrm>
-            <a:off x="1316736" y="3566160"/>
+            <a:off x="1316736" y="3401568"/>
             <a:ext cx="8534095" cy="457200"/>
           </a:xfrm>
           <a:prstGeom prst="rect">
@@ -37233,7 +37233,7 @@
                 <a:latin typeface="游ゴシック"/>
                 <a:ea typeface="游ゴシック"/>
               </a:rPr>
-              <a:t>デザイン・実装・AI検索対応の設定まで。写真素材をご支給いただくタイミングです</a:t>
+              <a:t>シートの内容からサイト構成とキーワードの一覧をご提案します。ご要望を反映してから着手します</a:t>
             </a:r>
           </a:p>
         </p:txBody>
@@ -37246,7 +37246,7 @@
         </p:nvSpPr>
         <p:spPr>
           <a:xfrm>
-            <a:off x="658368" y="4123944"/>
+            <a:off x="658368" y="3877056"/>
             <a:ext cx="457200" cy="457200"/>
           </a:xfrm>
           <a:prstGeom prst="rect">
@@ -37290,7 +37290,7 @@
         </p:nvSpPr>
         <p:spPr>
           <a:xfrm>
-            <a:off x="658368" y="4242816"/>
+            <a:off x="658368" y="3995928"/>
             <a:ext cx="457200" cy="274320"/>
           </a:xfrm>
           <a:prstGeom prst="rect">
@@ -37330,8 +37330,8 @@
         </p:nvSpPr>
         <p:spPr>
           <a:xfrm>
-            <a:off x="877824" y="4617720"/>
-            <a:ext cx="15240" cy="365760"/>
+            <a:off x="877824" y="4370832"/>
+            <a:ext cx="15240" cy="292608"/>
           </a:xfrm>
           <a:prstGeom prst="rect">
             <a:avLst/>
@@ -37374,7 +37374,7 @@
         </p:nvSpPr>
         <p:spPr>
           <a:xfrm>
-            <a:off x="1316736" y="4105656"/>
+            <a:off x="1316736" y="3858768"/>
             <a:ext cx="2743200" cy="274320"/>
           </a:xfrm>
           <a:prstGeom prst="rect">
@@ -37401,7 +37401,7 @@
                 <a:latin typeface="游ゴシック"/>
                 <a:ea typeface="游ゴシック"/>
               </a:rPr>
-              <a:t>公開・運用開始</a:t>
+              <a:t>サイト構築</a:t>
             </a:r>
           </a:p>
         </p:txBody>
@@ -37414,7 +37414,7 @@
         </p:nvSpPr>
         <p:spPr>
           <a:xfrm>
-            <a:off x="4133088" y="4142232"/>
+            <a:off x="4133088" y="3895344"/>
             <a:ext cx="868680" cy="256032"/>
           </a:xfrm>
           <a:prstGeom prst="rect">
@@ -37460,7 +37460,7 @@
         </p:nvSpPr>
         <p:spPr>
           <a:xfrm>
-            <a:off x="4133088" y="4178808"/>
+            <a:off x="4133088" y="3931920"/>
             <a:ext cx="868680" cy="219456"/>
           </a:xfrm>
           <a:prstGeom prst="rect">
@@ -37487,7 +37487,7 @@
                 <a:latin typeface="游ゴシック"/>
                 <a:ea typeface="游ゴシック"/>
               </a:rPr>
-              <a:t>翌日〜</a:t>
+              <a:t>2〜3週間</a:t>
             </a:r>
           </a:p>
         </p:txBody>
@@ -37500,7 +37500,7 @@
         </p:nvSpPr>
         <p:spPr>
           <a:xfrm>
-            <a:off x="1316736" y="4434840"/>
+            <a:off x="1316736" y="4187952"/>
             <a:ext cx="8534095" cy="457200"/>
           </a:xfrm>
           <a:prstGeom prst="rect">
@@ -37530,7 +37530,7 @@
                 <a:latin typeface="游ゴシック"/>
                 <a:ea typeface="游ゴシック"/>
               </a:rPr>
-              <a:t>公開の翌日から記事が増え始めます。1ヶ月目から月60本のペースで積み上がります</a:t>
+              <a:t>デザイン・実装・AI検索対応の設定まで。写真素材をご支給いただくタイミングです</a:t>
             </a:r>
           </a:p>
         </p:txBody>
@@ -37543,7 +37543,7 @@
         </p:nvSpPr>
         <p:spPr>
           <a:xfrm>
-            <a:off x="658368" y="4992624"/>
+            <a:off x="658368" y="4663440"/>
             <a:ext cx="457200" cy="457200"/>
           </a:xfrm>
           <a:prstGeom prst="rect">
@@ -37587,7 +37587,7 @@
         </p:nvSpPr>
         <p:spPr>
           <a:xfrm>
-            <a:off x="658368" y="5111496"/>
+            <a:off x="658368" y="4782312"/>
             <a:ext cx="457200" cy="274320"/>
           </a:xfrm>
           <a:prstGeom prst="rect">
@@ -37621,13 +37621,57 @@
       </p:sp>
       <p:sp>
         <p:nvSpPr>
-          <p:cNvPr id="36" name="TextBox 35"/>
-          <p:cNvSpPr txBox="1"/>
-          <p:nvPr/>
-        </p:nvSpPr>
-        <p:spPr>
-          <a:xfrm>
-            <a:off x="1316736" y="4974336"/>
+          <p:cNvPr id="36" name="Rectangle 35"/>
+          <p:cNvSpPr/>
+          <p:nvPr/>
+        </p:nvSpPr>
+        <p:spPr>
+          <a:xfrm>
+            <a:off x="877824" y="5157216"/>
+            <a:ext cx="15240" cy="292608"/>
+          </a:xfrm>
+          <a:prstGeom prst="rect">
+            <a:avLst/>
+          </a:prstGeom>
+          <a:solidFill>
+            <a:srgbClr val="E3EAF3"/>
+          </a:solidFill>
+          <a:ln>
+            <a:noFill/>
+          </a:ln>
+          <a:effectLst/>
+        </p:spPr>
+        <p:style>
+          <a:lnRef idx="1">
+            <a:schemeClr val="accent1"/>
+          </a:lnRef>
+          <a:fillRef idx="3">
+            <a:schemeClr val="accent1"/>
+          </a:fillRef>
+          <a:effectRef idx="2">
+            <a:schemeClr val="accent1"/>
+          </a:effectRef>
+          <a:fontRef idx="minor">
+            <a:schemeClr val="lt1"/>
+          </a:fontRef>
+        </p:style>
+        <p:txBody>
+          <a:bodyPr rtlCol="0" anchor="ctr" wrap="square"/>
+          <a:lstStyle/>
+          <a:p>
+            <a:pPr algn="ctr"/>
+          </a:p>
+        </p:txBody>
+      </p:sp>
+      <p:sp>
+        <p:nvSpPr>
+          <p:cNvPr id="37" name="TextBox 36"/>
+          <p:cNvSpPr txBox="1"/>
+          <p:nvPr/>
+        </p:nvSpPr>
+        <p:spPr>
+          <a:xfrm>
+            <a:off x="1316736" y="4645152"/>
             <a:ext cx="2743200" cy="274320"/>
           </a:xfrm>
           <a:prstGeom prst="rect">
@@ -37654,20 +37698,20 @@
                 <a:latin typeface="游ゴシック"/>
                 <a:ea typeface="游ゴシック"/>
               </a:rPr>
-              <a:t>毎月のレポート</a:t>
-            </a:r>
-          </a:p>
-        </p:txBody>
-      </p:sp>
-      <p:sp>
-        <p:nvSpPr>
-          <p:cNvPr id="37" name="Rectangle 36"/>
+              <a:t>公開・運用開始</a:t>
+            </a:r>
+          </a:p>
+        </p:txBody>
+      </p:sp>
+      <p:sp>
+        <p:nvSpPr>
+          <p:cNvPr id="38" name="Rectangle 37"/>
           <p:cNvSpPr/>
           <p:nvPr/>
         </p:nvSpPr>
         <p:spPr>
           <a:xfrm>
-            <a:off x="4133088" y="5010912"/>
+            <a:off x="4133088" y="4681728"/>
             <a:ext cx="868680" cy="256032"/>
           </a:xfrm>
           <a:prstGeom prst="rect">
@@ -37707,13 +37751,13 @@
       </p:sp>
       <p:sp>
         <p:nvSpPr>
-          <p:cNvPr id="38" name="TextBox 37"/>
-          <p:cNvSpPr txBox="1"/>
-          <p:nvPr/>
-        </p:nvSpPr>
-        <p:spPr>
-          <a:xfrm>
-            <a:off x="4133088" y="5047488"/>
+          <p:cNvPr id="39" name="TextBox 38"/>
+          <p:cNvSpPr txBox="1"/>
+          <p:nvPr/>
+        </p:nvSpPr>
+        <p:spPr>
+          <a:xfrm>
+            <a:off x="4133088" y="4718304"/>
             <a:ext cx="868680" cy="219456"/>
           </a:xfrm>
           <a:prstGeom prst="rect">
@@ -37740,20 +37784,20 @@
                 <a:latin typeface="游ゴシック"/>
                 <a:ea typeface="游ゴシック"/>
               </a:rPr>
-              <a:t>継続</a:t>
-            </a:r>
-          </a:p>
-        </p:txBody>
-      </p:sp>
-      <p:sp>
-        <p:nvSpPr>
-          <p:cNvPr id="39" name="TextBox 38"/>
-          <p:cNvSpPr txBox="1"/>
-          <p:nvPr/>
-        </p:nvSpPr>
-        <p:spPr>
-          <a:xfrm>
-            <a:off x="1316736" y="5303520"/>
+              <a:t>翌日〜</a:t>
+            </a:r>
+          </a:p>
+        </p:txBody>
+      </p:sp>
+      <p:sp>
+        <p:nvSpPr>
+          <p:cNvPr id="40" name="TextBox 39"/>
+          <p:cNvSpPr txBox="1"/>
+          <p:nvPr/>
+        </p:nvSpPr>
+        <p:spPr>
+          <a:xfrm>
+            <a:off x="1316736" y="4974336"/>
             <a:ext cx="8534095" cy="457200"/>
           </a:xfrm>
           <a:prstGeom prst="rect">
@@ -37783,6 +37827,259 @@
                 <a:latin typeface="游ゴシック"/>
                 <a:ea typeface="游ゴシック"/>
               </a:rPr>
+              <a:t>公開の翌日から記事が増え始めます。1ヶ月目から月60本のペースで積み上がります</a:t>
+            </a:r>
+          </a:p>
+        </p:txBody>
+      </p:sp>
+      <p:sp>
+        <p:nvSpPr>
+          <p:cNvPr id="41" name="Rectangle 40"/>
+          <p:cNvSpPr/>
+          <p:nvPr/>
+        </p:nvSpPr>
+        <p:spPr>
+          <a:xfrm>
+            <a:off x="658368" y="5449824"/>
+            <a:ext cx="457200" cy="457200"/>
+          </a:xfrm>
+          <a:prstGeom prst="rect">
+            <a:avLst/>
+          </a:prstGeom>
+          <a:solidFill>
+            <a:srgbClr val="B7922E"/>
+          </a:solidFill>
+          <a:ln>
+            <a:noFill/>
+          </a:ln>
+          <a:effectLst/>
+        </p:spPr>
+        <p:style>
+          <a:lnRef idx="1">
+            <a:schemeClr val="accent1"/>
+          </a:lnRef>
+          <a:fillRef idx="3">
+            <a:schemeClr val="accent1"/>
+          </a:fillRef>
+          <a:effectRef idx="2">
+            <a:schemeClr val="accent1"/>
+          </a:effectRef>
+          <a:fontRef idx="minor">
+            <a:schemeClr val="lt1"/>
+          </a:fontRef>
+        </p:style>
+        <p:txBody>
+          <a:bodyPr rtlCol="0" anchor="ctr" wrap="square"/>
+          <a:lstStyle/>
+          <a:p>
+            <a:pPr algn="ctr"/>
+          </a:p>
+        </p:txBody>
+      </p:sp>
+      <p:sp>
+        <p:nvSpPr>
+          <p:cNvPr id="42" name="TextBox 41"/>
+          <p:cNvSpPr txBox="1"/>
+          <p:nvPr/>
+        </p:nvSpPr>
+        <p:spPr>
+          <a:xfrm>
+            <a:off x="658368" y="5568696"/>
+            <a:ext cx="457200" cy="274320"/>
+          </a:xfrm>
+          <a:prstGeom prst="rect">
+            <a:avLst/>
+          </a:prstGeom>
+          <a:noFill/>
+        </p:spPr>
+        <p:txBody>
+          <a:bodyPr wrap="square" anchor="t" lIns="0" rIns="0" tIns="0" bIns="0">
+            <a:spAutoFit/>
+          </a:bodyPr>
+          <a:lstStyle/>
+          <a:p>
+            <a:pPr algn="ctr">
+              <a:spcAft>
+                <a:spcPts val="0"/>
+              </a:spcAft>
+            </a:pPr>
+            <a:r>
+              <a:rPr sz="1300" b="1">
+                <a:solidFill>
+                  <a:srgbClr val="FFFFFF"/>
+                </a:solidFill>
+                <a:latin typeface="游ゴシック"/>
+                <a:ea typeface="游ゴシック"/>
+              </a:rPr>
+              <a:t>06</a:t>
+            </a:r>
+          </a:p>
+        </p:txBody>
+      </p:sp>
+      <p:sp>
+        <p:nvSpPr>
+          <p:cNvPr id="43" name="TextBox 42"/>
+          <p:cNvSpPr txBox="1"/>
+          <p:nvPr/>
+        </p:nvSpPr>
+        <p:spPr>
+          <a:xfrm>
+            <a:off x="1316736" y="5431536"/>
+            <a:ext cx="2743200" cy="274320"/>
+          </a:xfrm>
+          <a:prstGeom prst="rect">
+            <a:avLst/>
+          </a:prstGeom>
+          <a:noFill/>
+        </p:spPr>
+        <p:txBody>
+          <a:bodyPr wrap="square" anchor="t" lIns="0" rIns="0" tIns="0" bIns="0">
+            <a:spAutoFit/>
+          </a:bodyPr>
+          <a:lstStyle/>
+          <a:p>
+            <a:pPr algn="l">
+              <a:spcAft>
+                <a:spcPts val="0"/>
+              </a:spcAft>
+            </a:pPr>
+            <a:r>
+              <a:rPr sz="1400" b="1">
+                <a:solidFill>
+                  <a:srgbClr val="0B2447"/>
+                </a:solidFill>
+                <a:latin typeface="游ゴシック"/>
+                <a:ea typeface="游ゴシック"/>
+              </a:rPr>
+              <a:t>毎月のレポート</a:t>
+            </a:r>
+          </a:p>
+        </p:txBody>
+      </p:sp>
+      <p:sp>
+        <p:nvSpPr>
+          <p:cNvPr id="44" name="Rectangle 43"/>
+          <p:cNvSpPr/>
+          <p:nvPr/>
+        </p:nvSpPr>
+        <p:spPr>
+          <a:xfrm>
+            <a:off x="4133088" y="5468112"/>
+            <a:ext cx="868680" cy="256032"/>
+          </a:xfrm>
+          <a:prstGeom prst="rect">
+            <a:avLst/>
+          </a:prstGeom>
+          <a:solidFill>
+            <a:srgbClr val="F5F8FC"/>
+          </a:solidFill>
+          <a:ln w="12700">
+            <a:solidFill>
+              <a:srgbClr val="E3EAF3"/>
+            </a:solidFill>
+          </a:ln>
+          <a:effectLst/>
+        </p:spPr>
+        <p:style>
+          <a:lnRef idx="1">
+            <a:schemeClr val="accent1"/>
+          </a:lnRef>
+          <a:fillRef idx="3">
+            <a:schemeClr val="accent1"/>
+          </a:fillRef>
+          <a:effectRef idx="2">
+            <a:schemeClr val="accent1"/>
+          </a:effectRef>
+          <a:fontRef idx="minor">
+            <a:schemeClr val="lt1"/>
+          </a:fontRef>
+        </p:style>
+        <p:txBody>
+          <a:bodyPr rtlCol="0" anchor="ctr" wrap="square"/>
+          <a:lstStyle/>
+          <a:p>
+            <a:pPr algn="ctr"/>
+          </a:p>
+        </p:txBody>
+      </p:sp>
+      <p:sp>
+        <p:nvSpPr>
+          <p:cNvPr id="45" name="TextBox 44"/>
+          <p:cNvSpPr txBox="1"/>
+          <p:nvPr/>
+        </p:nvSpPr>
+        <p:spPr>
+          <a:xfrm>
+            <a:off x="4133088" y="5504688"/>
+            <a:ext cx="868680" cy="219456"/>
+          </a:xfrm>
+          <a:prstGeom prst="rect">
+            <a:avLst/>
+          </a:prstGeom>
+          <a:noFill/>
+        </p:spPr>
+        <p:txBody>
+          <a:bodyPr wrap="square" anchor="t" lIns="0" rIns="0" tIns="0" bIns="0">
+            <a:spAutoFit/>
+          </a:bodyPr>
+          <a:lstStyle/>
+          <a:p>
+            <a:pPr algn="ctr">
+              <a:spcAft>
+                <a:spcPts val="0"/>
+              </a:spcAft>
+            </a:pPr>
+            <a:r>
+              <a:rPr sz="1050" b="1">
+                <a:solidFill>
+                  <a:srgbClr val="0D9488"/>
+                </a:solidFill>
+                <a:latin typeface="游ゴシック"/>
+                <a:ea typeface="游ゴシック"/>
+              </a:rPr>
+              <a:t>継続</a:t>
+            </a:r>
+          </a:p>
+        </p:txBody>
+      </p:sp>
+      <p:sp>
+        <p:nvSpPr>
+          <p:cNvPr id="46" name="TextBox 45"/>
+          <p:cNvSpPr txBox="1"/>
+          <p:nvPr/>
+        </p:nvSpPr>
+        <p:spPr>
+          <a:xfrm>
+            <a:off x="1316736" y="5760720"/>
+            <a:ext cx="8534095" cy="457200"/>
+          </a:xfrm>
+          <a:prstGeom prst="rect">
+            <a:avLst/>
+          </a:prstGeom>
+          <a:noFill/>
+        </p:spPr>
+        <p:txBody>
+          <a:bodyPr wrap="square" anchor="t" lIns="0" rIns="0" tIns="0" bIns="0">
+            <a:spAutoFit/>
+          </a:bodyPr>
+          <a:lstStyle/>
+          <a:p>
+            <a:pPr algn="l">
+              <a:lnSpc>
+                <a:spcPct val="140000"/>
+              </a:lnSpc>
+              <a:spcAft>
+                <a:spcPts val="0"/>
+              </a:spcAft>
+            </a:pPr>
+            <a:r>
+              <a:rPr sz="1150" b="0">
+                <a:solidFill>
+                  <a:srgbClr val="1A2233"/>
+                </a:solidFill>
+                <a:latin typeface="游ゴシック"/>
+                <a:ea typeface="游ゴシック"/>
+              </a:rPr>
               <a:t>数字の報告と、翌月の改善指示をお渡しします。ご要望に応じてキーワードの追加も承ります</a:t>
             </a:r>
           </a:p>
@@ -37790,7 +38087,7 @@
       </p:sp>
       <p:sp>
         <p:nvSpPr>
-          <p:cNvPr id="40" name="Rectangle 39"/>
+          <p:cNvPr id="47" name="Rectangle 46"/>
           <p:cNvSpPr/>
           <p:nvPr/>
         </p:nvSpPr>
@@ -37834,7 +38131,7 @@
       </p:sp>
       <p:sp>
         <p:nvSpPr>
-          <p:cNvPr id="41" name="TextBox 40"/>
+          <p:cNvPr id="48" name="TextBox 47"/>
           <p:cNvSpPr txBox="1"/>
           <p:nvPr/>
         </p:nvSpPr>

--- a/docs/sales/service-proposal.pptx
+++ b/docs/sales/service-proposal.pptx
@@ -3727,7 +3727,7 @@
                 <a:latin typeface="游ゴシック"/>
                 <a:ea typeface="游ゴシック"/>
               </a:rPr>
-              <a:t>2026年09月</a:t>
+              <a:t>2026年10月</a:t>
             </a:r>
           </a:p>
         </p:txBody>
@@ -4975,7 +4975,7 @@
                 <a:latin typeface="游ゴシック"/>
                 <a:ea typeface="游ゴシック"/>
               </a:rPr>
-              <a:t>機械採点19項目を全て通したうえで、6つの観点から120点満点で採点。基準に届かなければ自動で修正して再採点する</a:t>
+              <a:t>機械採点18項目を全て通したうえで、執筆とは別の工程が3観点で採点。基準に届かなければ自動で修正して再採点する</a:t>
             </a:r>
           </a:p>
         </p:txBody>
@@ -9120,7 +9120,7 @@
                 <a:latin typeface="游ゴシック"/>
                 <a:ea typeface="游ゴシック"/>
               </a:rPr>
-              <a:t>6観点120点の採点</a:t>
+              <a:t>3観点×100点の採点</a:t>
             </a:r>
           </a:p>
         </p:txBody>
@@ -9249,7 +9249,7 @@
                 <a:latin typeface="游ゴシック"/>
                 <a:ea typeface="游ゴシック"/>
               </a:rPr>
-              <a:t>デザイン/SEO/編集/技術/読者/AI検索</a:t>
+              <a:t>一次性／抽出性／決定支援。各80点以上＋総合90点以上</a:t>
             </a:r>
           </a:p>
         </p:txBody>
@@ -17174,7 +17174,7 @@
                 <a:latin typeface="游ゴシック"/>
                 <a:ea typeface="游ゴシック"/>
               </a:rPr>
-              <a:t>19項目</a:t>
+              <a:t>18項目</a:t>
             </a:r>
           </a:p>
         </p:txBody>
@@ -17347,7 +17347,7 @@
                 <a:latin typeface="游ゴシック"/>
                 <a:ea typeface="游ゴシック"/>
               </a:rPr>
-              <a:t>6観点の採点</a:t>
+              <a:t>別工程の採点</a:t>
             </a:r>
           </a:p>
         </p:txBody>
@@ -17433,7 +17433,7 @@
                 <a:latin typeface="游ゴシック"/>
                 <a:ea typeface="游ゴシック"/>
               </a:rPr>
-              <a:t>120点満点</a:t>
+              <a:t>3観点×100点</a:t>
             </a:r>
           </a:p>
         </p:txBody>
@@ -17476,7 +17476,7 @@
                 <a:latin typeface="游ゴシック"/>
                 <a:ea typeface="游ゴシック"/>
               </a:rPr>
-              <a:t>デザイン／SEO／編集／技術正確性／読者目線／AI検索対応の6観点。各観点20点で、1観点でも16点未満なら合計に関わらず不合格</a:t>
+              <a:t>一次性／抽出性／決定支援。執筆とは別の工程が本文だけを読んで採点。1観点でも80点未満なら、総合が高くても不合格</a:t>
             </a:r>
           </a:p>
         </p:txBody>
@@ -41931,7 +41931,7 @@
                 <a:latin typeface="游ゴシック"/>
                 <a:ea typeface="游ゴシック"/>
               </a:rPr>
-              <a:t>AI特有の言い回しを排除する7項目を全記事でチェックし、一人称の体験・観察を必ず入れています。さらに6観点120点満点の採点で基準に届かない記事は公開されません。実際の記事は貴社サイトでご確認いただけますので、まずは既存メディアの記事をご覧ください。</a:t>
+              <a:t>AI特有の言い回しを排除する7項目を全記事でチェックし、一人称の体験・観察を必ず入れています。さらに3観点（一次性・抽出性・決定支援）の採点で、各80点以上かつ総合90点以上に届かない記事は公開されません。実際の記事は貴社サイトでご確認いただけますので、まずは既存メディアの記事をご覧ください。</a:t>
             </a:r>
           </a:p>
         </p:txBody>
@@ -42098,7 +42098,7 @@
                 <a:latin typeface="游ゴシック"/>
                 <a:ea typeface="游ゴシック"/>
               </a:rPr>
-              <a:t>検索での順位は、記事公開から評価が安定するまで3〜6ヶ月かかるのが一般的です。ただし記事は資産として積み上がるため、6ヶ月目以降は同じ費用でも成果が伸び続けます。初月から見えるのは、インデックス登録状況と表示回数の増加です。</a:t>
+              <a:t>検索での順位は、記事公開から評価が安定するまで6〜8ヶ月かかるのが一般的です。ただし記事は資産として積み上がるため、8ヶ月目以降は同じ費用でも成果が伸び続けます。初月から見えるのは、インデックス登録状況と表示回数の増加です。</a:t>
             </a:r>
           </a:p>
         </p:txBody>
